--- a/assets/pptx/catalog-462.pptx
+++ b/assets/pptx/catalog-462.pptx
@@ -3248,7 +3248,7 @@
                 <a:ea typeface="Ebrima"/>
                 <a:cs typeface="Ebrima"/>
               </a:rPr>
-              <a:t>- እድለኛ ነኝ እኔ (2x) እድለኛ</a:t>
+              <a:t>- እድለኛ ነኝ እኔ 2x እድለኛ</a:t>
             </a:r>
           </a:p>
           <a:p>
@@ -3647,7 +3647,7 @@
                 <a:ea typeface="Ebrima"/>
                 <a:cs typeface="Ebrima"/>
               </a:rPr>
-              <a:t>በእርሱ እድሜ አይቀለድም (4x)</a:t>
+              <a:t>በእርሱ እድሜ አይቀለድም 4x</a:t>
             </a:r>
           </a:p>
         </p:txBody>
@@ -3956,7 +3956,7 @@
                 <a:ea typeface="Ebrima"/>
                 <a:cs typeface="Ebrima"/>
               </a:rPr>
-              <a:t>- እድለኛ ነኝ እኔ (2x) እድለኛ</a:t>
+              <a:t>- እድለኛ ነኝ እኔ 2x እድለኛ</a:t>
             </a:r>
           </a:p>
           <a:p>
@@ -4010,7 +4010,7 @@
                 <a:ea typeface="Ebrima"/>
                 <a:cs typeface="Ebrima"/>
               </a:rPr>
-              <a:t>ለአምልኮ ማን ይቀድመኛል (2x)</a:t>
+              <a:t>ለአምልኮ ማን ይቀድመኛል 2x</a:t>
             </a:r>
           </a:p>
         </p:txBody>
